--- a/public/fun/pack/pptx/weddingpro/결혼식프리미엄_43_식순중심_크림슨골드.pptx
+++ b/public/fun/pack/pptx/weddingpro/결혼식프리미엄_43_식순중심_크림슨골드.pptx
@@ -113,12 +113,12 @@
   <p:extLst>
     <p:ext uri="{521415D9-36F7-43E2-AB2F-B90AF26B5E84}">
       <p14:sectionLst xmlns:p14="http://schemas.microsoft.com/office/powerpoint/2010/main">
-        <p14:section name="시작" id="{0F34C31B-B8AD-41F2-8310-280F4BC9AA79}">
+        <p14:section name="시작" id="{A90FC53E-CC5F-4049-B1E9-5BD2D553F773}">
           <p14:sldIdLst>
             <p14:sldId id="256"/>
           </p14:sldIdLst>
         </p14:section>
-        <p14:section name="본문" id="{3DDFB1A2-0EF2-4EB6-9FE7-9AC9AD621F0E}">
+        <p14:section name="본문" id="{02ADDC30-FEA2-412E-ACF6-BAC504C79B4B}">
           <p14:sldIdLst>
             <p14:sldId id="257"/>
             <p14:sldId id="258"/>
@@ -127,7 +127,7 @@
             <p14:sldId id="261"/>
           </p14:sldIdLst>
         </p14:section>
-        <p14:section name="마무리" id="{627A8C1D-4FFD-401A-AD02-BD373D8C250E}">
+        <p14:section name="마무리" id="{229C3B11-EC89-4FC4-AE69-FE31772222FE}">
           <p14:sldIdLst>
             <p14:sldId id="262"/>
           </p14:sldIdLst>
@@ -1648,7 +1648,7 @@
             </a:lvl1pPr>
           </a:lstStyle>
           <a:p>
-            <a:fld id="{E367B506-670D-475C-8873-9DFF2708012F}" type="slidenum">
+            <a:fld id="{AEA1D83C-E855-4488-A29C-E07B701054B5}" type="slidenum">
               <a:rPr lang="en-US"/>
               <a:t>‹#›</a:t>
             </a:fld>
@@ -2401,7 +2401,7 @@
             </a:lvl1pPr>
           </a:lstStyle>
           <a:p>
-            <a:fld id="{2C7C6D48-45D4-4475-A66A-C2D38CA0159F}" type="slidenum">
+            <a:fld id="{A3AE7977-F601-4DB2-BA0C-C9E4ED2215A6}" type="slidenum">
               <a:rPr lang="en-US"/>
               <a:t>‹#›</a:t>
             </a:fld>
@@ -3030,7 +3030,7 @@
             </a:lvl1pPr>
           </a:lstStyle>
           <a:p>
-            <a:fld id="{1E979351-3847-49D8-88DA-A6FACE67674D}" type="slidenum">
+            <a:fld id="{5DE2AA49-EBE3-476D-B4BA-C235CDE07779}" type="slidenum">
               <a:rPr lang="en-US"/>
               <a:t>‹#›</a:t>
             </a:fld>
@@ -3869,7 +3869,7 @@
           <a:p>
             <a:r>
               <a:rPr lang="ko-KR"/>
-              <a:t>겨울이라 실내에서만 진행합니다</a:t>
+              <a:t>식은 실내에서만 진행합니다</a:t>
             </a:r>
           </a:p>
         </p:txBody>
@@ -3897,7 +3897,7 @@
           <a:p>
             <a:r>
               <a:rPr lang="ko-KR"/>
-              <a:t>0000. 00. 00 · 예식장 이름</a:t>
+              <a:t>날짜 입력 · 예식장 이름</a:t>
             </a:r>
           </a:p>
         </p:txBody>
@@ -4132,7 +4132,7 @@
           <a:bodyPr/>
           <a:lstStyle/>
           <a:p>
-            <a:fld id="{B52802A7-5EFE-4C4C-850A-45AEE2AEC2F5}" type="slidenum">
+            <a:fld id="{A50C11AE-32EA-4A6B-AF4A-70069198AB30}" type="slidenum">
               <a:rPr lang="en-US"/>
               <a:t>‹#›</a:t>
             </a:fld>
@@ -4588,7 +4588,7 @@
           <a:bodyPr/>
           <a:lstStyle/>
           <a:p>
-            <a:fld id="{FDE81224-2C28-4F9B-8FB1-CA2FCE68AF28}" type="slidenum">
+            <a:fld id="{2448BAA4-B5DF-4333-8CAD-618B27CBBAC0}" type="slidenum">
               <a:rPr lang="en-US"/>
               <a:t>‹#›</a:t>
             </a:fld>
@@ -5417,7 +5417,7 @@
           <a:bodyPr/>
           <a:lstStyle/>
           <a:p>
-            <a:fld id="{3EB4B644-DCDE-42EB-8589-FB3CFCB104E5}" type="slidenum">
+            <a:fld id="{6181174B-C484-4435-A43E-F96F40D8DD56}" type="slidenum">
               <a:rPr lang="en-US"/>
               <a:t>‹#›</a:t>
             </a:fld>
@@ -6738,7 +6738,7 @@
           <a:bodyPr/>
           <a:lstStyle/>
           <a:p>
-            <a:fld id="{B185C47D-1F1E-409C-B1D8-7B39DE953640}" type="slidenum">
+            <a:fld id="{2B7C593A-2168-4743-ACC0-FCC65ACEE3E3}" type="slidenum">
               <a:rPr lang="en-US"/>
               <a:t>‹#›</a:t>
             </a:fld>
@@ -6826,7 +6826,7 @@
           <a:bodyPr/>
           <a:lstStyle/>
           <a:p>
-            <a:fld id="{7913D8CB-8BFD-4455-B0FD-56AE966A43DB}" type="slidenum">
+            <a:fld id="{87546DE0-7DC7-4008-A646-FBAFEC686472}" type="slidenum">
               <a:rPr lang="en-US"/>
               <a:t>‹#›</a:t>
             </a:fld>
